--- a/presentation.pptx
+++ b/presentation.pptx
@@ -273,7 +273,7 @@
             </a:pPr>
             <a:fld id="{0B618E28-0D5E-47D8-9C2C-0A8A26D7B4DF}" type="datetime1">
               <a:rPr lang="ru-RU"/>
-              <a:t>28.05.2026</a:t>
+              <a:t>03.06.2026</a:t>
             </a:fld>
             <a:endParaRPr lang="ru-RU"/>
           </a:p>
@@ -614,7 +614,7 @@
             </a:pPr>
             <a:fld id="{86199DC5-DB7C-4D8D-9C1C-B3627CE70E71}" type="datetime1">
               <a:rPr lang="ru-RU"/>
-              <a:t>28.05.2026</a:t>
+              <a:t>03.06.2026</a:t>
             </a:fld>
             <a:endParaRPr lang="ru-RU"/>
           </a:p>
@@ -965,7 +965,7 @@
             </a:pPr>
             <a:fld id="{A593288B-1062-4A24-AFE1-BDB914941150}" type="datetime1">
               <a:rPr lang="ru-RU"/>
-              <a:t>28.05.2026</a:t>
+              <a:t>03.06.2026</a:t>
             </a:fld>
             <a:endParaRPr lang="ru-RU"/>
           </a:p>
@@ -1306,7 +1306,7 @@
             </a:pPr>
             <a:fld id="{90FC2D7C-BD08-4E8D-81FB-B7126A57FEF9}" type="datetime1">
               <a:rPr lang="ru-RU"/>
-              <a:t>28.05.2026</a:t>
+              <a:t>03.06.2026</a:t>
             </a:fld>
             <a:endParaRPr lang="ru-RU"/>
           </a:p>
@@ -1712,7 +1712,7 @@
             </a:pPr>
             <a:fld id="{A6E8F45C-D6FB-4947-BAB5-C8D126959F27}" type="datetime1">
               <a:rPr lang="ru-RU"/>
-              <a:t>28.05.2026</a:t>
+              <a:t>03.06.2026</a:t>
             </a:fld>
             <a:endParaRPr lang="ru-RU"/>
           </a:p>
@@ -2129,7 +2129,7 @@
             </a:pPr>
             <a:fld id="{266AEFB2-ACA5-4A72-AAC1-C6F952E6C104}" type="datetime1">
               <a:rPr lang="ru-RU"/>
-              <a:t>28.05.2026</a:t>
+              <a:t>03.06.2026</a:t>
             </a:fld>
             <a:endParaRPr lang="ru-RU"/>
           </a:p>
@@ -2687,7 +2687,7 @@
             </a:pPr>
             <a:fld id="{C4B9A982-5645-43B9-84A1-905FB65FDC9E}" type="datetime1">
               <a:rPr lang="ru-RU"/>
-              <a:t>28.05.2026</a:t>
+              <a:t>03.06.2026</a:t>
             </a:fld>
             <a:endParaRPr lang="ru-RU"/>
           </a:p>
@@ -2962,7 +2962,7 @@
             </a:pPr>
             <a:fld id="{86B351DB-CC90-4EF1-B727-81968AB6A722}" type="datetime1">
               <a:rPr lang="ru-RU"/>
-              <a:t>28.05.2026</a:t>
+              <a:t>03.06.2026</a:t>
             </a:fld>
             <a:endParaRPr lang="ru-RU"/>
           </a:p>
@@ -3211,7 +3211,7 @@
             </a:pPr>
             <a:fld id="{21A031DB-D346-4986-93C2-BC1ADF970FE5}" type="datetime1">
               <a:rPr lang="ru-RU"/>
-              <a:t>28.05.2026</a:t>
+              <a:t>03.06.2026</a:t>
             </a:fld>
             <a:endParaRPr lang="ru-RU"/>
           </a:p>
@@ -3662,7 +3662,7 @@
             </a:pPr>
             <a:fld id="{29DBCAF6-18F4-4F9C-9CCF-3E506739B393}" type="datetime1">
               <a:rPr lang="ru-RU"/>
-              <a:t>28.05.2026</a:t>
+              <a:t>03.06.2026</a:t>
             </a:fld>
             <a:endParaRPr lang="ru-RU"/>
           </a:p>
@@ -3928,7 +3928,7 @@
             </a:pPr>
             <a:fld id="{244A2D6C-751F-4902-A10B-6D1BB14184D8}" type="datetime1">
               <a:rPr lang="ru-RU"/>
-              <a:t>28.05.2026</a:t>
+              <a:t>03.06.2026</a:t>
             </a:fld>
             <a:endParaRPr lang="ru-RU"/>
           </a:p>
@@ -4312,7 +4312,7 @@
             </a:pPr>
             <a:fld id="{3560E26F-59BD-4CE3-9E55-A0DE13F72C05}" type="datetime1">
               <a:rPr lang="ru-RU"/>
-              <a:t>28.05.2026</a:t>
+              <a:t>03.06.2026</a:t>
             </a:fld>
             <a:endParaRPr lang="ru-RU"/>
           </a:p>
@@ -4949,48 +4949,92 @@
               <a:defRPr/>
             </a:pPr>
             <a:r>
-              <a:rPr lang="ru-RU">
+              <a:rPr lang="ru-RU" dirty="0">
                 <a:solidFill>
                   <a:srgbClr val="07226D"/>
                 </a:solidFill>
                 <a:latin typeface="Arial"/>
                 <a:cs typeface="Arial"/>
               </a:rPr>
-              <a:t>Что получилось (измеримый результат)</a:t>
-            </a:r>
-            <a:endParaRPr/>
-          </a:p>
-          <a:p>
-            <a:pPr>
-              <a:defRPr/>
-            </a:pPr>
-            <a:r>
-              <a:rPr lang="ru-RU">
+              <a:t>Что получилось:</a:t>
+            </a:r>
+          </a:p>
+          <a:p>
+            <a:pPr>
+              <a:defRPr/>
+            </a:pPr>
+            <a:r>
+              <a:rPr lang="ru-RU" dirty="0">
                 <a:solidFill>
                   <a:srgbClr val="07226D"/>
                 </a:solidFill>
                 <a:latin typeface="Arial"/>
                 <a:cs typeface="Arial"/>
               </a:rPr>
-              <a:t>Кому и как можно применять программу</a:t>
-            </a:r>
-            <a:endParaRPr/>
-          </a:p>
-          <a:p>
-            <a:pPr>
-              <a:defRPr/>
-            </a:pPr>
-            <a:r>
-              <a:rPr lang="ru-RU">
+              <a:t>2д Игра с видом сверху имеющая базовый функционал</a:t>
+            </a:r>
+          </a:p>
+          <a:p>
+            <a:pPr>
+              <a:defRPr/>
+            </a:pPr>
+            <a:r>
+              <a:rPr lang="ru-RU" dirty="0">
                 <a:solidFill>
                   <a:srgbClr val="07226D"/>
                 </a:solidFill>
                 <a:latin typeface="Arial"/>
                 <a:cs typeface="Arial"/>
               </a:rPr>
+              <a:t>Кому и как можно применять программу:</a:t>
+            </a:r>
+          </a:p>
+          <a:p>
+            <a:pPr>
+              <a:defRPr/>
+            </a:pPr>
+            <a:r>
+              <a:rPr lang="ru-RU" dirty="0">
+                <a:solidFill>
+                  <a:srgbClr val="07226D"/>
+                </a:solidFill>
+                <a:latin typeface="Arial"/>
+                <a:cs typeface="Arial"/>
+              </a:rPr>
+              <a:t>?</a:t>
+            </a:r>
+            <a:endParaRPr dirty="0"/>
+          </a:p>
+          <a:p>
+            <a:pPr>
+              <a:defRPr/>
+            </a:pPr>
+            <a:r>
+              <a:rPr lang="ru-RU" dirty="0">
+                <a:solidFill>
+                  <a:srgbClr val="07226D"/>
+                </a:solidFill>
+                <a:latin typeface="Arial"/>
+                <a:cs typeface="Arial"/>
+              </a:rPr>
               <a:t>Возможные улучшения в будущем</a:t>
             </a:r>
-            <a:endParaRPr/>
+          </a:p>
+          <a:p>
+            <a:pPr>
+              <a:defRPr/>
+            </a:pPr>
+            <a:r>
+              <a:rPr lang="ru-RU" dirty="0">
+                <a:solidFill>
+                  <a:srgbClr val="07226D"/>
+                </a:solidFill>
+                <a:latin typeface="Arial"/>
+                <a:cs typeface="Arial"/>
+              </a:rPr>
+              <a:t>Добавление системы кнопок и активации.</a:t>
+            </a:r>
+            <a:endParaRPr dirty="0"/>
           </a:p>
         </p:txBody>
       </p:sp>
@@ -5096,7 +5140,7 @@
               <a:defRPr/>
             </a:pPr>
             <a:r>
-              <a:rPr lang="ru-RU">
+              <a:rPr lang="ru-RU" dirty="0">
                 <a:solidFill>
                   <a:srgbClr val="07226D"/>
                 </a:solidFill>
@@ -5105,39 +5149,49 @@
               </a:rPr>
               <a:t>Спасибо за внимание</a:t>
             </a:r>
-            <a:endParaRPr/>
-          </a:p>
-          <a:p>
-            <a:pPr>
-              <a:defRPr/>
-            </a:pPr>
-            <a:r>
-              <a:rPr lang="ru-RU">
+            <a:endParaRPr dirty="0"/>
+          </a:p>
+          <a:p>
+            <a:pPr>
+              <a:defRPr/>
+            </a:pPr>
+            <a:r>
+              <a:rPr lang="ru-RU" dirty="0">
                 <a:solidFill>
                   <a:srgbClr val="07226D"/>
                 </a:solidFill>
                 <a:latin typeface="Arial"/>
                 <a:cs typeface="Arial"/>
               </a:rPr>
-              <a:t>Контакты автора (эл. почта)</a:t>
-            </a:r>
-            <a:endParaRPr/>
-          </a:p>
-          <a:p>
-            <a:pPr>
-              <a:defRPr/>
-            </a:pPr>
-            <a:r>
-              <a:rPr lang="ru-RU">
+              <a:t>Контакты </a:t>
+            </a:r>
+            <a:r>
+              <a:rPr lang="en-US" dirty="0">
                 <a:solidFill>
                   <a:srgbClr val="07226D"/>
                 </a:solidFill>
                 <a:latin typeface="Arial"/>
                 <a:cs typeface="Arial"/>
               </a:rPr>
+              <a:t>belaevd201103@gmail.com</a:t>
+            </a:r>
+            <a:endParaRPr dirty="0"/>
+          </a:p>
+          <a:p>
+            <a:pPr>
+              <a:defRPr/>
+            </a:pPr>
+            <a:r>
+              <a:rPr lang="ru-RU" dirty="0">
+                <a:solidFill>
+                  <a:srgbClr val="07226D"/>
+                </a:solidFill>
+                <a:latin typeface="Arial"/>
+                <a:cs typeface="Arial"/>
+              </a:rPr>
               <a:t>Приглашение задать вопросы</a:t>
             </a:r>
-            <a:endParaRPr/>
+            <a:endParaRPr dirty="0"/>
           </a:p>
         </p:txBody>
       </p:sp>
@@ -6152,7 +6206,7 @@
               <a:defRPr/>
             </a:pPr>
             <a:r>
-              <a:rPr lang="ru-RU" sz="4000" b="1">
+              <a:rPr lang="ru-RU" sz="4000" b="1" dirty="0">
                 <a:solidFill>
                   <a:srgbClr val="07226D"/>
                 </a:solidFill>
@@ -6161,7 +6215,7 @@
               </a:rPr>
               <a:t>Демонстрация программы</a:t>
             </a:r>
-            <a:endParaRPr/>
+            <a:endParaRPr dirty="0"/>
           </a:p>
         </p:txBody>
       </p:sp>
@@ -6184,7 +6238,7 @@
               <a:defRPr/>
             </a:pPr>
             <a:r>
-              <a:rPr lang="ru-RU">
+              <a:rPr lang="ru-RU" dirty="0">
                 <a:solidFill>
                   <a:srgbClr val="07226D"/>
                 </a:solidFill>
@@ -6193,39 +6247,80 @@
               </a:rPr>
               <a:t>Скриншот (или GIF) запуска</a:t>
             </a:r>
-            <a:endParaRPr/>
-          </a:p>
-          <a:p>
-            <a:pPr>
-              <a:defRPr/>
-            </a:pPr>
-            <a:r>
-              <a:rPr lang="ru-RU">
+            <a:endParaRPr lang="en-US" dirty="0">
+              <a:solidFill>
+                <a:srgbClr val="07226D"/>
+              </a:solidFill>
+              <a:latin typeface="Arial"/>
+              <a:cs typeface="Arial"/>
+            </a:endParaRPr>
+          </a:p>
+          <a:p>
+            <a:pPr>
+              <a:defRPr/>
+            </a:pPr>
+            <a:endParaRPr lang="en-US" dirty="0"/>
+          </a:p>
+          <a:p>
+            <a:pPr>
+              <a:defRPr/>
+            </a:pPr>
+            <a:endParaRPr lang="en-US" dirty="0"/>
+          </a:p>
+          <a:p>
+            <a:pPr>
+              <a:defRPr/>
+            </a:pPr>
+            <a:endParaRPr lang="en-US" dirty="0"/>
+          </a:p>
+          <a:p>
+            <a:pPr>
+              <a:defRPr/>
+            </a:pPr>
+            <a:endParaRPr lang="en-US" dirty="0"/>
+          </a:p>
+          <a:p>
+            <a:pPr marL="0" indent="0">
+              <a:buNone/>
+              <a:defRPr/>
+            </a:pPr>
+            <a:endParaRPr lang="en-US" dirty="0"/>
+          </a:p>
+          <a:p>
+            <a:pPr marL="0" indent="0">
+              <a:buNone/>
+              <a:defRPr/>
+            </a:pPr>
+            <a:r>
+              <a:rPr lang="ru-RU" dirty="0">
                 <a:solidFill>
                   <a:srgbClr val="07226D"/>
                 </a:solidFill>
                 <a:latin typeface="Arial"/>
                 <a:cs typeface="Arial"/>
               </a:rPr>
-              <a:t>Ключевой экран/вывод результата</a:t>
-            </a:r>
-            <a:endParaRPr/>
-          </a:p>
-          <a:p>
-            <a:pPr>
-              <a:defRPr/>
-            </a:pPr>
-            <a:r>
-              <a:rPr lang="ru-RU">
+              <a:t>Короткий комментарий: </a:t>
+            </a:r>
+            <a:br>
+              <a:rPr lang="en-US" dirty="0">
                 <a:solidFill>
                   <a:srgbClr val="07226D"/>
                 </a:solidFill>
                 <a:latin typeface="Arial"/>
                 <a:cs typeface="Arial"/>
               </a:rPr>
-              <a:t>Короткий комментарий: «На вводе …, на выводе …»</a:t>
-            </a:r>
-            <a:endParaRPr/>
+            </a:br>
+            <a:r>
+              <a:rPr lang="ru-RU" dirty="0">
+                <a:solidFill>
+                  <a:srgbClr val="07226D"/>
+                </a:solidFill>
+                <a:latin typeface="Arial"/>
+                <a:cs typeface="Arial"/>
+              </a:rPr>
+              <a:t>слева меню, справа окно игры</a:t>
+            </a:r>
+            <a:endParaRPr dirty="0"/>
           </a:p>
         </p:txBody>
       </p:sp>
@@ -6255,6 +6350,76 @@
           </a:p>
         </p:txBody>
       </p:sp>
+      <p:pic>
+        <p:nvPicPr>
+          <p:cNvPr id="6" name="Рисунок 5">
+            <a:extLst>
+              <a:ext uri="{FF2B5EF4-FFF2-40B4-BE49-F238E27FC236}">
+                <a16:creationId xmlns:a16="http://schemas.microsoft.com/office/drawing/2014/main" id="{8DA2ECED-A16B-483F-8060-3BB60F39D5D1}"/>
+              </a:ext>
+            </a:extLst>
+          </p:cNvPr>
+          <p:cNvPicPr>
+            <a:picLocks noChangeAspect="1"/>
+          </p:cNvPicPr>
+          <p:nvPr/>
+        </p:nvPicPr>
+        <p:blipFill rotWithShape="1">
+          <a:blip r:embed="rId2">
+            <a:extLst>
+              <a:ext uri="{28A0092B-C50C-407E-A947-70E740481C1C}">
+                <a14:useLocalDpi xmlns:a14="http://schemas.microsoft.com/office/drawing/2010/main" val="0"/>
+              </a:ext>
+            </a:extLst>
+          </a:blip>
+          <a:srcRect l="1654" t="5702" r="92678" b="85250"/>
+          <a:stretch/>
+        </p:blipFill>
+        <p:spPr>
+          <a:xfrm>
+            <a:off x="838200" y="2268262"/>
+            <a:ext cx="2585357" cy="2321475"/>
+          </a:xfrm>
+          <a:prstGeom prst="rect">
+            <a:avLst/>
+          </a:prstGeom>
+        </p:spPr>
+      </p:pic>
+      <p:pic>
+        <p:nvPicPr>
+          <p:cNvPr id="8" name="Рисунок 7">
+            <a:extLst>
+              <a:ext uri="{FF2B5EF4-FFF2-40B4-BE49-F238E27FC236}">
+                <a16:creationId xmlns:a16="http://schemas.microsoft.com/office/drawing/2014/main" id="{CBB109DD-80B9-418D-BE37-B23321A92108}"/>
+              </a:ext>
+            </a:extLst>
+          </p:cNvPr>
+          <p:cNvPicPr>
+            <a:picLocks noChangeAspect="1"/>
+          </p:cNvPicPr>
+          <p:nvPr/>
+        </p:nvPicPr>
+        <p:blipFill rotWithShape="1">
+          <a:blip r:embed="rId3">
+            <a:extLst>
+              <a:ext uri="{28A0092B-C50C-407E-A947-70E740481C1C}">
+                <a14:useLocalDpi xmlns:a14="http://schemas.microsoft.com/office/drawing/2010/main" val="0"/>
+              </a:ext>
+            </a:extLst>
+          </a:blip>
+          <a:srcRect l="1473" t="5324" r="84732" b="69541"/>
+          <a:stretch/>
+        </p:blipFill>
+        <p:spPr>
+          <a:xfrm>
+            <a:off x="3423557" y="2277544"/>
+            <a:ext cx="2275114" cy="2331804"/>
+          </a:xfrm>
+          <a:prstGeom prst="rect">
+            <a:avLst/>
+          </a:prstGeom>
+        </p:spPr>
+      </p:pic>
     </p:spTree>
   </p:cSld>
   <p:clrMapOvr>
@@ -6331,32 +6496,88 @@
               <a:defRPr/>
             </a:pPr>
             <a:r>
-              <a:rPr lang="ru-RU">
+              <a:rPr lang="ru-RU" dirty="0">
                 <a:solidFill>
                   <a:srgbClr val="07226D"/>
                 </a:solidFill>
                 <a:latin typeface="Arial"/>
                 <a:cs typeface="Arial"/>
               </a:rPr>
-              <a:t>Таблица: входные данные → ожидаемый / фактический результат</a:t>
-            </a:r>
-            <a:endParaRPr/>
-          </a:p>
-          <a:p>
-            <a:pPr>
-              <a:defRPr/>
-            </a:pPr>
-            <a:r>
-              <a:rPr lang="ru-RU">
+              <a:t>Таблица: </a:t>
+            </a:r>
+          </a:p>
+          <a:p>
+            <a:pPr>
+              <a:defRPr/>
+            </a:pPr>
+            <a:endParaRPr lang="ru-RU" dirty="0">
+              <a:solidFill>
+                <a:srgbClr val="07226D"/>
+              </a:solidFill>
+              <a:latin typeface="Arial"/>
+              <a:cs typeface="Arial"/>
+            </a:endParaRPr>
+          </a:p>
+          <a:p>
+            <a:pPr>
+              <a:defRPr/>
+            </a:pPr>
+            <a:endParaRPr lang="ru-RU" dirty="0">
+              <a:solidFill>
+                <a:srgbClr val="07226D"/>
+              </a:solidFill>
+              <a:latin typeface="Arial"/>
+              <a:cs typeface="Arial"/>
+            </a:endParaRPr>
+          </a:p>
+          <a:p>
+            <a:pPr>
+              <a:defRPr/>
+            </a:pPr>
+            <a:endParaRPr lang="ru-RU" dirty="0">
+              <a:solidFill>
+                <a:srgbClr val="07226D"/>
+              </a:solidFill>
+              <a:latin typeface="Arial"/>
+              <a:cs typeface="Arial"/>
+            </a:endParaRPr>
+          </a:p>
+          <a:p>
+            <a:pPr>
+              <a:defRPr/>
+            </a:pPr>
+            <a:br>
+              <a:rPr lang="ru-RU" dirty="0">
                 <a:solidFill>
                   <a:srgbClr val="07226D"/>
                 </a:solidFill>
                 <a:latin typeface="Arial"/>
                 <a:cs typeface="Arial"/>
               </a:rPr>
-              <a:t>Указать, что все тесты пройдены</a:t>
-            </a:r>
-            <a:endParaRPr/>
+            </a:br>
+            <a:endParaRPr lang="ru-RU" dirty="0">
+              <a:solidFill>
+                <a:srgbClr val="07226D"/>
+              </a:solidFill>
+              <a:latin typeface="Arial"/>
+              <a:cs typeface="Arial"/>
+            </a:endParaRPr>
+          </a:p>
+          <a:p>
+            <a:pPr>
+              <a:defRPr/>
+            </a:pPr>
+            <a:r>
+              <a:rPr lang="ru-RU" dirty="0">
+                <a:solidFill>
+                  <a:srgbClr val="07226D"/>
+                </a:solidFill>
+                <a:latin typeface="Arial"/>
+                <a:cs typeface="Arial"/>
+              </a:rPr>
+              <a:t>Все тесты пройдены</a:t>
+            </a:r>
+            <a:endParaRPr dirty="0"/>
           </a:p>
         </p:txBody>
       </p:sp>
@@ -6386,6 +6607,294 @@
           </a:p>
         </p:txBody>
       </p:sp>
+      <p:graphicFrame>
+        <p:nvGraphicFramePr>
+          <p:cNvPr id="5" name="Таблица 5">
+            <a:extLst>
+              <a:ext uri="{FF2B5EF4-FFF2-40B4-BE49-F238E27FC236}">
+                <a16:creationId xmlns:a16="http://schemas.microsoft.com/office/drawing/2014/main" id="{00FE2489-2AC4-4697-9E31-1A46091E673A}"/>
+              </a:ext>
+            </a:extLst>
+          </p:cNvPr>
+          <p:cNvGraphicFramePr>
+            <a:graphicFrameLocks noGrp="1"/>
+          </p:cNvGraphicFramePr>
+          <p:nvPr>
+            <p:extLst>
+              <p:ext uri="{D42A27DB-BD31-4B8C-83A1-F6EECF244321}">
+                <p14:modId xmlns:p14="http://schemas.microsoft.com/office/powerpoint/2010/main" val="3079880289"/>
+              </p:ext>
+            </p:extLst>
+          </p:nvPr>
+        </p:nvGraphicFramePr>
+        <p:xfrm>
+          <a:off x="838200" y="2415200"/>
+          <a:ext cx="8127999" cy="2296160"/>
+        </p:xfrm>
+        <a:graphic>
+          <a:graphicData uri="http://schemas.openxmlformats.org/drawingml/2006/table">
+            <a:tbl>
+              <a:tblPr firstRow="1" bandRow="1">
+                <a:tableStyleId>{5C22544A-7EE6-4342-B048-85BDC9FD1C3A}</a:tableStyleId>
+              </a:tblPr>
+              <a:tblGrid>
+                <a:gridCol w="2709333">
+                  <a:extLst>
+                    <a:ext uri="{9D8B030D-6E8A-4147-A177-3AD203B41FA5}">
+                      <a16:colId xmlns:a16="http://schemas.microsoft.com/office/drawing/2014/main" val="3513445951"/>
+                    </a:ext>
+                  </a:extLst>
+                </a:gridCol>
+                <a:gridCol w="2709333">
+                  <a:extLst>
+                    <a:ext uri="{9D8B030D-6E8A-4147-A177-3AD203B41FA5}">
+                      <a16:colId xmlns:a16="http://schemas.microsoft.com/office/drawing/2014/main" val="4066125847"/>
+                    </a:ext>
+                  </a:extLst>
+                </a:gridCol>
+                <a:gridCol w="2709333">
+                  <a:extLst>
+                    <a:ext uri="{9D8B030D-6E8A-4147-A177-3AD203B41FA5}">
+                      <a16:colId xmlns:a16="http://schemas.microsoft.com/office/drawing/2014/main" val="435723979"/>
+                    </a:ext>
+                  </a:extLst>
+                </a:gridCol>
+              </a:tblGrid>
+              <a:tr h="370840">
+                <a:tc>
+                  <a:txBody>
+                    <a:bodyPr/>
+                    <a:lstStyle/>
+                    <a:p>
+                      <a:r>
+                        <a:rPr lang="ru-RU" dirty="0"/>
+                        <a:t>ввод</a:t>
+                      </a:r>
+                    </a:p>
+                  </a:txBody>
+                  <a:tcPr/>
+                </a:tc>
+                <a:tc>
+                  <a:txBody>
+                    <a:bodyPr/>
+                    <a:lstStyle/>
+                    <a:p>
+                      <a:r>
+                        <a:rPr lang="ru-RU" dirty="0"/>
+                        <a:t>ожидание</a:t>
+                      </a:r>
+                    </a:p>
+                  </a:txBody>
+                  <a:tcPr/>
+                </a:tc>
+                <a:tc>
+                  <a:txBody>
+                    <a:bodyPr/>
+                    <a:lstStyle/>
+                    <a:p>
+                      <a:r>
+                        <a:rPr lang="ru-RU" dirty="0"/>
+                        <a:t>результат</a:t>
+                      </a:r>
+                    </a:p>
+                  </a:txBody>
+                  <a:tcPr/>
+                </a:tc>
+                <a:extLst>
+                  <a:ext uri="{0D108BD9-81ED-4DB2-BD59-A6C34878D82A}">
+                    <a16:rowId xmlns:a16="http://schemas.microsoft.com/office/drawing/2014/main" val="933928594"/>
+                  </a:ext>
+                </a:extLst>
+              </a:tr>
+              <a:tr h="370840">
+                <a:tc>
+                  <a:txBody>
+                    <a:bodyPr/>
+                    <a:lstStyle/>
+                    <a:p>
+                      <a:r>
+                        <a:rPr lang="en-US" dirty="0" err="1"/>
+                        <a:t>wasd</a:t>
+                      </a:r>
+                      <a:endParaRPr lang="ru-RU" dirty="0"/>
+                    </a:p>
+                  </a:txBody>
+                  <a:tcPr/>
+                </a:tc>
+                <a:tc>
+                  <a:txBody>
+                    <a:bodyPr/>
+                    <a:lstStyle/>
+                    <a:p>
+                      <a:r>
+                        <a:rPr lang="ru-RU" dirty="0"/>
+                        <a:t>движение</a:t>
+                      </a:r>
+                    </a:p>
+                  </a:txBody>
+                  <a:tcPr/>
+                </a:tc>
+                <a:tc>
+                  <a:txBody>
+                    <a:bodyPr/>
+                    <a:lstStyle/>
+                    <a:p>
+                      <a:r>
+                        <a:rPr lang="ru-RU" dirty="0"/>
+                        <a:t>движение</a:t>
+                      </a:r>
+                    </a:p>
+                  </a:txBody>
+                  <a:tcPr/>
+                </a:tc>
+                <a:extLst>
+                  <a:ext uri="{0D108BD9-81ED-4DB2-BD59-A6C34878D82A}">
+                    <a16:rowId xmlns:a16="http://schemas.microsoft.com/office/drawing/2014/main" val="1062108516"/>
+                  </a:ext>
+                </a:extLst>
+              </a:tr>
+              <a:tr h="370840">
+                <a:tc>
+                  <a:txBody>
+                    <a:bodyPr/>
+                    <a:lstStyle/>
+                    <a:p>
+                      <a:r>
+                        <a:rPr lang="en-US" dirty="0" err="1"/>
+                        <a:t>Wasd</a:t>
+                      </a:r>
+                      <a:r>
+                        <a:rPr lang="en-US" dirty="0"/>
+                        <a:t> </a:t>
+                      </a:r>
+                      <a:r>
+                        <a:rPr lang="ru-RU" dirty="0"/>
+                        <a:t>в «●»</a:t>
+                      </a:r>
+                    </a:p>
+                  </a:txBody>
+                  <a:tcPr/>
+                </a:tc>
+                <a:tc>
+                  <a:txBody>
+                    <a:bodyPr/>
+                    <a:lstStyle/>
+                    <a:p>
+                      <a:r>
+                        <a:rPr lang="ru-RU" dirty="0"/>
+                        <a:t>Движение + толкание камня</a:t>
+                      </a:r>
+                    </a:p>
+                  </a:txBody>
+                  <a:tcPr/>
+                </a:tc>
+                <a:tc>
+                  <a:txBody>
+                    <a:bodyPr/>
+                    <a:lstStyle/>
+                    <a:p>
+                      <a:pPr marL="0" marR="0" lvl="0" indent="0" algn="l" defTabSz="914400" eaLnBrk="1" fontAlgn="auto" latinLnBrk="0" hangingPunct="1">
+                        <a:lnSpc>
+                          <a:spcPct val="100000"/>
+                        </a:lnSpc>
+                        <a:spcBef>
+                          <a:spcPts val="0"/>
+                        </a:spcBef>
+                        <a:spcAft>
+                          <a:spcPts val="0"/>
+                        </a:spcAft>
+                        <a:buClrTx/>
+                        <a:buSzTx/>
+                        <a:buFontTx/>
+                        <a:buNone/>
+                        <a:tabLst/>
+                        <a:defRPr/>
+                      </a:pPr>
+                      <a:r>
+                        <a:rPr lang="ru-RU" dirty="0"/>
+                        <a:t>движение + толкание камня</a:t>
+                      </a:r>
+                    </a:p>
+                  </a:txBody>
+                  <a:tcPr/>
+                </a:tc>
+                <a:extLst>
+                  <a:ext uri="{0D108BD9-81ED-4DB2-BD59-A6C34878D82A}">
+                    <a16:rowId xmlns:a16="http://schemas.microsoft.com/office/drawing/2014/main" val="3419988429"/>
+                  </a:ext>
+                </a:extLst>
+              </a:tr>
+              <a:tr h="378437">
+                <a:tc>
+                  <a:txBody>
+                    <a:bodyPr/>
+                    <a:lstStyle/>
+                    <a:p>
+                      <a:r>
+                        <a:rPr lang="ru-RU" dirty="0"/>
+                        <a:t>Столкновение с «!»</a:t>
+                      </a:r>
+                    </a:p>
+                  </a:txBody>
+                  <a:tcPr/>
+                </a:tc>
+                <a:tc>
+                  <a:txBody>
+                    <a:bodyPr/>
+                    <a:lstStyle/>
+                    <a:p>
+                      <a:r>
+                        <a:rPr lang="ru-RU" dirty="0"/>
+                        <a:t>Победный экран\следующий уровень</a:t>
+                      </a:r>
+                    </a:p>
+                  </a:txBody>
+                  <a:tcPr/>
+                </a:tc>
+                <a:tc>
+                  <a:txBody>
+                    <a:bodyPr/>
+                    <a:lstStyle/>
+                    <a:p>
+                      <a:pPr marL="0" marR="0" lvl="0" indent="0" algn="l" defTabSz="914400" eaLnBrk="1" fontAlgn="auto" latinLnBrk="0" hangingPunct="1">
+                        <a:lnSpc>
+                          <a:spcPct val="100000"/>
+                        </a:lnSpc>
+                        <a:spcBef>
+                          <a:spcPts val="0"/>
+                        </a:spcBef>
+                        <a:spcAft>
+                          <a:spcPts val="0"/>
+                        </a:spcAft>
+                        <a:buClrTx/>
+                        <a:buSzTx/>
+                        <a:buFontTx/>
+                        <a:buNone/>
+                        <a:tabLst/>
+                        <a:defRPr/>
+                      </a:pPr>
+                      <a:r>
+                        <a:rPr lang="ru-RU"/>
+                        <a:t>выход\</a:t>
+                      </a:r>
+                      <a:r>
+                        <a:rPr lang="ru-RU" dirty="0"/>
+                        <a:t>следующий уровень</a:t>
+                      </a:r>
+                    </a:p>
+                  </a:txBody>
+                  <a:tcPr/>
+                </a:tc>
+                <a:extLst>
+                  <a:ext uri="{0D108BD9-81ED-4DB2-BD59-A6C34878D82A}">
+                    <a16:rowId xmlns:a16="http://schemas.microsoft.com/office/drawing/2014/main" val="1652191654"/>
+                  </a:ext>
+                </a:extLst>
+              </a:tr>
+            </a:tbl>
+          </a:graphicData>
+        </a:graphic>
+      </p:graphicFrame>
     </p:spTree>
   </p:cSld>
   <p:clrMapOvr>
@@ -6462,32 +6971,66 @@
               <a:defRPr/>
             </a:pPr>
             <a:r>
-              <a:rPr lang="ru-RU">
+              <a:rPr lang="ru-RU" dirty="0">
                 <a:solidFill>
                   <a:srgbClr val="07226D"/>
                 </a:solidFill>
                 <a:latin typeface="Arial"/>
                 <a:cs typeface="Arial"/>
               </a:rPr>
-              <a:t>2–3 трудности, с которыми столкнулись</a:t>
-            </a:r>
-            <a:endParaRPr/>
-          </a:p>
-          <a:p>
-            <a:pPr>
-              <a:defRPr/>
-            </a:pPr>
-            <a:r>
-              <a:rPr lang="ru-RU">
+              <a:t>2–3 трудности, с которыми столкнулись:</a:t>
+            </a:r>
+            <a:br>
+              <a:rPr lang="ru-RU" dirty="0">
                 <a:solidFill>
                   <a:srgbClr val="07226D"/>
                 </a:solidFill>
                 <a:latin typeface="Arial"/>
                 <a:cs typeface="Arial"/>
               </a:rPr>
+            </a:br>
+            <a:r>
+              <a:rPr lang="ru-RU" dirty="0">
+                <a:solidFill>
+                  <a:srgbClr val="07226D"/>
+                </a:solidFill>
+                <a:latin typeface="Arial"/>
+                <a:cs typeface="Arial"/>
+              </a:rPr>
+              <a:t>много проблем с отрисовкой</a:t>
+            </a:r>
+            <a:endParaRPr dirty="0"/>
+          </a:p>
+          <a:p>
+            <a:pPr>
+              <a:defRPr/>
+            </a:pPr>
+            <a:r>
+              <a:rPr lang="ru-RU" dirty="0">
+                <a:solidFill>
+                  <a:srgbClr val="07226D"/>
+                </a:solidFill>
+                <a:latin typeface="Arial"/>
+                <a:cs typeface="Arial"/>
+              </a:rPr>
               <a:t>Как их преодолели (поиск в документации, смена алгоритма и т.д.)</a:t>
             </a:r>
-            <a:endParaRPr/>
+          </a:p>
+          <a:p>
+            <a:pPr>
+              <a:defRPr/>
+            </a:pPr>
+            <a:r>
+              <a:rPr lang="ru-RU" dirty="0">
+                <a:solidFill>
+                  <a:srgbClr val="07226D"/>
+                </a:solidFill>
+                <a:latin typeface="Arial"/>
+                <a:cs typeface="Arial"/>
+              </a:rPr>
+              <a:t>Починил их</a:t>
+            </a:r>
+            <a:endParaRPr dirty="0"/>
           </a:p>
         </p:txBody>
       </p:sp>

--- a/presentation.pptx
+++ b/presentation.pptx
@@ -4878,6 +4878,18 @@
   <p:clrMapOvr>
     <a:masterClrMapping/>
   </p:clrMapOvr>
+  <mc:AlternateContent xmlns:mc="http://schemas.openxmlformats.org/markup-compatibility/2006">
+    <mc:Choice xmlns:p14="http://schemas.microsoft.com/office/powerpoint/2010/main" Requires="p14">
+      <p:transition spd="slow">
+        <p14:glitter pattern="hexagon"/>
+      </p:transition>
+    </mc:Choice>
+    <mc:Fallback>
+      <p:transition spd="slow">
+        <p:fade/>
+      </p:transition>
+    </mc:Fallback>
+  </mc:AlternateContent>
 </p:sld>
 </file>
 
@@ -5069,6 +5081,9 @@
   <p:clrMapOvr>
     <a:masterClrMapping/>
   </p:clrMapOvr>
+  <p:transition spd="slow">
+    <p:push dir="u"/>
+  </p:transition>
 </p:sld>
 </file>
 
@@ -5226,6 +5241,9 @@
   <p:clrMapOvr>
     <a:masterClrMapping/>
   </p:clrMapOvr>
+  <p:transition spd="slow">
+    <p:push dir="u"/>
+  </p:transition>
 </p:sld>
 </file>
 
@@ -5385,6 +5403,9 @@
   <p:clrMapOvr>
     <a:masterClrMapping/>
   </p:clrMapOvr>
+  <p:transition spd="slow">
+    <p:push dir="u"/>
+  </p:transition>
 </p:sld>
 </file>
 
@@ -5546,6 +5567,9 @@
   <p:clrMapOvr>
     <a:masterClrMapping/>
   </p:clrMapOvr>
+  <p:transition spd="slow">
+    <p:push dir="u"/>
+  </p:transition>
 </p:sld>
 </file>
 
@@ -5768,6 +5792,9 @@
   <p:clrMapOvr>
     <a:masterClrMapping/>
   </p:clrMapOvr>
+  <p:transition spd="slow">
+    <p:push dir="u"/>
+  </p:transition>
 </p:sld>
 </file>
 
@@ -6001,6 +6028,9 @@
   <p:clrMapOvr>
     <a:masterClrMapping/>
   </p:clrMapOvr>
+  <p:transition spd="slow">
+    <p:push dir="u"/>
+  </p:transition>
 </p:sld>
 </file>
 
@@ -6167,6 +6197,9 @@
   <p:clrMapOvr>
     <a:masterClrMapping/>
   </p:clrMapOvr>
+  <p:transition spd="slow">
+    <p:push dir="u"/>
+  </p:transition>
 </p:sld>
 </file>
 
@@ -6425,6 +6458,9 @@
   <p:clrMapOvr>
     <a:masterClrMapping/>
   </p:clrMapOvr>
+  <p:transition spd="slow">
+    <p:push dir="u"/>
+  </p:transition>
 </p:sld>
 </file>
 
@@ -6900,6 +6936,9 @@
   <p:clrMapOvr>
     <a:masterClrMapping/>
   </p:clrMapOvr>
+  <p:transition spd="slow">
+    <p:push dir="u"/>
+  </p:transition>
 </p:sld>
 </file>
 
@@ -7065,6 +7104,9 @@
   <p:clrMapOvr>
     <a:masterClrMapping/>
   </p:clrMapOvr>
+  <p:transition spd="slow">
+    <p:push dir="u"/>
+  </p:transition>
 </p:sld>
 </file>
 

--- a/presentation.pptx
+++ b/presentation.pptx
@@ -4878,13 +4878,13 @@
   <p:clrMapOvr>
     <a:masterClrMapping/>
   </p:clrMapOvr>
-  <mc:AlternateContent xmlns:mc="http://schemas.openxmlformats.org/markup-compatibility/2006">
-    <mc:Choice xmlns:p14="http://schemas.microsoft.com/office/powerpoint/2010/main" Requires="p14">
+  <mc:AlternateContent xmlns:mc="http://schemas.openxmlformats.org/markup-compatibility/2006" xmlns:p14="http://schemas.microsoft.com/office/powerpoint/2010/main">
+    <mc:Choice Requires="p14">
       <p:transition spd="slow">
         <p14:glitter pattern="hexagon"/>
       </p:transition>
     </mc:Choice>
-    <mc:Fallback>
+    <mc:Fallback xmlns="">
       <p:transition spd="slow">
         <p:fade/>
       </p:transition>
@@ -5013,7 +5013,7 @@
                 <a:latin typeface="Arial"/>
                 <a:cs typeface="Arial"/>
               </a:rPr>
-              <a:t>?</a:t>
+              <a:t>Всем кто хочет в неё поиграть</a:t>
             </a:r>
             <a:endParaRPr dirty="0"/>
           </a:p>
@@ -5485,7 +5485,7 @@
                 <a:ea typeface="Times New Roman" panose="02020603050405020304" pitchFamily="18" charset="0"/>
                 <a:cs typeface="Arial" panose="020B0604020202020204" pitchFamily="34" charset="0"/>
               </a:rPr>
-              <a:t>использования </a:t>
+              <a:t>Научиться использовать </a:t>
             </a:r>
             <a:r>
               <a:rPr lang="ru-RU" dirty="0" err="1">
@@ -7038,7 +7038,13 @@
               </a:rPr>
               <a:t>много проблем с отрисовкой</a:t>
             </a:r>
-            <a:endParaRPr dirty="0"/>
+            <a:endParaRPr lang="en-US" dirty="0">
+              <a:solidFill>
+                <a:srgbClr val="07226D"/>
+              </a:solidFill>
+              <a:latin typeface="Arial"/>
+              <a:cs typeface="Arial"/>
+            </a:endParaRPr>
           </a:p>
           <a:p>
             <a:pPr>
@@ -7052,22 +7058,63 @@
                 <a:latin typeface="Arial"/>
                 <a:cs typeface="Arial"/>
               </a:rPr>
-              <a:t>Как их преодолели (поиск в документации, смена алгоритма и т.д.)</a:t>
-            </a:r>
-          </a:p>
-          <a:p>
-            <a:pPr>
-              <a:defRPr/>
-            </a:pPr>
-            <a:r>
-              <a:rPr lang="ru-RU" dirty="0">
+              <a:t>Хотел реализовать систему кнопок как в </a:t>
+            </a:r>
+            <a:r>
+              <a:rPr lang="en-US" dirty="0">
                 <a:solidFill>
                   <a:srgbClr val="07226D"/>
                 </a:solidFill>
                 <a:latin typeface="Arial"/>
                 <a:cs typeface="Arial"/>
               </a:rPr>
+              <a:t>portal</a:t>
+            </a:r>
+            <a:endParaRPr dirty="0"/>
+          </a:p>
+          <a:p>
+            <a:pPr>
+              <a:defRPr/>
+            </a:pPr>
+            <a:r>
+              <a:rPr lang="ru-RU" dirty="0">
+                <a:solidFill>
+                  <a:srgbClr val="07226D"/>
+                </a:solidFill>
+                <a:latin typeface="Arial"/>
+                <a:cs typeface="Arial"/>
+              </a:rPr>
+              <a:t>Как их преодолели (поиск в документации, смена алгоритма и т.д.)</a:t>
+            </a:r>
+          </a:p>
+          <a:p>
+            <a:pPr>
+              <a:defRPr/>
+            </a:pPr>
+            <a:r>
+              <a:rPr lang="ru-RU" dirty="0">
+                <a:solidFill>
+                  <a:srgbClr val="07226D"/>
+                </a:solidFill>
+                <a:latin typeface="Arial"/>
+                <a:cs typeface="Arial"/>
+              </a:rPr>
               <a:t>Починил их</a:t>
+            </a:r>
+          </a:p>
+          <a:p>
+            <a:pPr>
+              <a:defRPr/>
+            </a:pPr>
+            <a:r>
+              <a:rPr lang="ru-RU" dirty="0">
+                <a:solidFill>
+                  <a:srgbClr val="07226D"/>
+                </a:solidFill>
+                <a:latin typeface="Arial"/>
+                <a:cs typeface="Arial"/>
+              </a:rPr>
+              <a:t>Пришлось вырезать</a:t>
             </a:r>
             <a:endParaRPr dirty="0"/>
           </a:p>
